--- a/docs/jamii-wso2-integration.pptx
+++ b/docs/jamii-wso2-integration.pptx
@@ -163,276 +163,6 @@
 </p:presentation>
 </file>
 
-<file path=ppt/charts/chart1.xml><?xml version="1.0" encoding="utf-8"?>
-<c:chartSpace xmlns:c="http://schemas.openxmlformats.org/drawingml/2006/chart" xmlns:a="http://schemas.openxmlformats.org/drawingml/2006/main" xmlns:r="http://schemas.openxmlformats.org/officeDocument/2006/relationships">
-  <c:date1904 val="0"/>
-  <c:roundedCorners val="1"/>
-  <c:chart>
-    <c:title>
-      <c:tx>
-        <c:rich>
-          <a:bodyPr/>
-          <a:lstStyle/>
-          <a:p>
-            <a:pPr>
-              <a:defRPr sz="1400" b="0" i="0" u="none" strike="noStrike">
-                <a:solidFill>
-                  <a:srgbClr val="0E3B2E"/>
-                </a:solidFill>
-                <a:latin typeface="+mj-lt"/>
-              </a:defRPr>
-            </a:pPr>
-            <a:r>
-              <a:rPr sz="1400" b="0" i="0" u="none" strike="noStrike">
-                <a:solidFill>
-                  <a:srgbClr val="0E3B2E"/>
-                </a:solidFill>
-                <a:latin typeface="+mj-lt"/>
-              </a:rPr>
-              <a:t>Automated checks by suite</a:t>
-            </a:r>
-          </a:p>
-        </c:rich>
-      </c:tx>
-      <c:layout/>
-      <c:overlay val="0"/>
-    </c:title>
-    <c:autoTitleDeleted val="0"/>
-    <c:plotArea>
-      <c:layout/>
-      <c:barChart>
-        <c:barDir val="bar"/>
-        <c:grouping val="clustered"/>
-        <c:varyColors val="0"/>
-        <c:ser>
-          <c:idx val="0"/>
-          <c:order val="0"/>
-          <c:tx>
-            <c:strRef>
-              <c:f>Sheet1!$B$1</c:f>
-              <c:strCache>
-                <c:ptCount val="1"/>
-                <c:pt idx="0">
-                  <c:v>Automated checks</c:v>
-                </c:pt>
-              </c:strCache>
-            </c:strRef>
-          </c:tx>
-          <c:spPr>
-            <a:solidFill>
-              <a:srgbClr val="1F7A5C"/>
-            </a:solidFill>
-            <a:effectLst/>
-          </c:spPr>
-          <c:invertIfNegative val="0"/>
-          <c:dLbls>
-            <c:numFmt formatCode="#,##0" sourceLinked="0"/>
-            <c:txPr>
-              <a:bodyPr/>
-              <a:lstStyle/>
-              <a:p>
-                <a:pPr>
-                  <a:defRPr b="0" i="0" strike="noStrike" sz="1200" u="none">
-                    <a:solidFill>
-                      <a:srgbClr val="1B2A24"/>
-                    </a:solidFill>
-                    <a:latin typeface="+mn-lt"/>
-                  </a:defRPr>
-                </a:pPr>
-              </a:p>
-            </c:txPr>
-            <c:showLegendKey val="0"/>
-            <c:showVal val="1"/>
-            <c:showCatName val="0"/>
-            <c:showSerName val="0"/>
-            <c:showPercent val="0"/>
-            <c:showBubbleSize val="0"/>
-            <c:showLeaderLines val="0"/>
-          </c:dLbls>
-          <c:cat>
-            <c:multiLvlStrRef>
-              <c:f>Sheet1!$A$2:$A$6</c:f>
-              <c:multiLvlStrCache>
-                <c:ptCount val="5"/>
-                <c:lvl>
-                  <c:pt idx="0">
-                    <c:v>Postman assertions (per target)</c:v>
-                  </c:pt>
-                  <c:pt idx="1">
-                    <c:v>MI artifact tests</c:v>
-                  </c:pt>
-                  <c:pt idx="2">
-                    <c:v>Tool and mock unit tests</c:v>
-                  </c:pt>
-                  <c:pt idx="3">
-                    <c:v>Event scenarios</c:v>
-                  </c:pt>
-                  <c:pt idx="4">
-                    <c:v>Outage tests</c:v>
-                  </c:pt>
-                </c:lvl>
-              </c:multiLvlStrCache>
-            </c:multiLvlStrRef>
-          </c:cat>
-          <c:val>
-            <c:numRef>
-              <c:f>Sheet1!$B$2:$B$6</c:f>
-              <c:numCache>
-                <c:formatCode>General</c:formatCode>
-                <c:ptCount val="5"/>
-                <c:pt idx="0">
-                  <c:v>104</c:v>
-                </c:pt>
-                <c:pt idx="1">
-                  <c:v>40</c:v>
-                </c:pt>
-                <c:pt idx="2">
-                  <c:v>24</c:v>
-                </c:pt>
-                <c:pt idx="3">
-                  <c:v>6</c:v>
-                </c:pt>
-                <c:pt idx="4">
-                  <c:v>4</c:v>
-                </c:pt>
-              </c:numCache>
-            </c:numRef>
-          </c:val>
-        </c:ser>
-        <c:dLbls>
-          <c:numFmt formatCode="#,##0" sourceLinked="0"/>
-          <c:txPr>
-            <a:bodyPr/>
-            <a:lstStyle/>
-            <a:p>
-              <a:pPr>
-                <a:defRPr b="0" i="0" strike="noStrike" sz="1200" u="none">
-                  <a:solidFill>
-                    <a:srgbClr val="1B2A24"/>
-                  </a:solidFill>
-                  <a:latin typeface="+mn-lt"/>
-                </a:defRPr>
-              </a:pPr>
-            </a:p>
-          </c:txPr>
-          <c:showLegendKey val="0"/>
-          <c:showVal val="1"/>
-          <c:showCatName val="0"/>
-          <c:showSerName val="0"/>
-          <c:showPercent val="0"/>
-          <c:showBubbleSize val="0"/>
-          <c:showLeaderLines val="0"/>
-        </c:dLbls>
-        <c:gapWidth val="150"/>
-        <c:overlap val="0"/>
-        <c:axId val="2094734554"/>
-        <c:axId val="2094734552"/>
-        <c:axId val="2094734556"/>
-      </c:barChart>
-      <c:catAx>
-        <c:axId val="2094734554"/>
-        <c:scaling>
-          <c:orientation val="maxMin"/>
-        </c:scaling>
-        <c:delete val="0"/>
-        <c:axPos val="l"/>
-        <c:numFmt formatCode="General" sourceLinked="1"/>
-        <c:majorTickMark val="out"/>
-        <c:minorTickMark val="none"/>
-        <c:tickLblPos val="nextTo"/>
-        <c:spPr>
-          <a:ln w="12700" cap="flat">
-            <a:solidFill>
-              <a:srgbClr val="888888"/>
-            </a:solidFill>
-            <a:prstDash val="solid"/>
-            <a:round/>
-          </a:ln>
-        </c:spPr>
-        <c:txPr>
-          <a:bodyPr/>
-          <a:lstStyle/>
-          <a:p>
-            <a:pPr>
-              <a:defRPr sz="1200" b="0" i="0" u="none" strike="noStrike">
-                <a:solidFill>
-                  <a:srgbClr val="5B6B66"/>
-                </a:solidFill>
-                <a:latin typeface="+mn-lt"/>
-              </a:defRPr>
-            </a:pPr>
-            <a:endParaRPr lang="en-US"/>
-          </a:p>
-        </c:txPr>
-        <c:crossAx val="2094734552"/>
-        <c:crosses val="autoZero"/>
-        <c:auto val="1"/>
-        <c:lblAlgn val="ctr"/>
-        <c:noMultiLvlLbl val="1"/>
-      </c:catAx>
-      <c:valAx>
-        <c:axId val="2094734552"/>
-        <c:scaling>
-          <c:orientation val="minMax"/>
-        </c:scaling>
-        <c:delete val="1"/>
-        <c:axPos val="b"/>
-        <c:numFmt formatCode="General" sourceLinked="0"/>
-        <c:majorTickMark val="out"/>
-        <c:minorTickMark val="none"/>
-        <c:tickLblPos val="low"/>
-        <c:spPr>
-          <a:ln w="12700" cap="flat">
-            <a:solidFill>
-              <a:srgbClr val="888888"/>
-            </a:solidFill>
-            <a:prstDash val="solid"/>
-            <a:round/>
-          </a:ln>
-        </c:spPr>
-        <c:txPr>
-          <a:bodyPr/>
-          <a:lstStyle/>
-          <a:p>
-            <a:pPr>
-              <a:defRPr sz="1200" b="0" i="0" u="none" strike="noStrike">
-                <a:solidFill>
-                  <a:srgbClr val="000000"/>
-                </a:solidFill>
-                <a:latin typeface="Arial"/>
-              </a:defRPr>
-            </a:pPr>
-            <a:endParaRPr lang="en-US"/>
-          </a:p>
-        </c:txPr>
-        <c:crossAx val="2094734554"/>
-        <c:crosses val="autoZero"/>
-        <c:crossBetween val="between"/>
-      </c:valAx>
-      <c:spPr>
-        <a:noFill/>
-        <a:ln>
-          <a:noFill/>
-        </a:ln>
-        <a:effectLst/>
-      </c:spPr>
-    </c:plotArea>
-    <c:plotVisOnly val="1"/>
-    <c:dispBlanksAs val="span"/>
-  </c:chart>
-  <c:spPr>
-    <a:noFill/>
-    <a:ln>
-      <a:noFill/>
-    </a:ln>
-    <a:effectLst/>
-  </c:spPr>
-  <c:externalData r:id="rId1">
-    <c:autoUpdate val="0"/>
-  </c:externalData>
-</c:chartSpace>
-</file>
-
 <file path=ppt/notesMasters/notesMaster1.xml><?xml version="1.0" encoding="utf-8"?>
 <p:notesMaster xmlns:a="http://schemas.openxmlformats.org/drawingml/2006/main" xmlns:r="http://schemas.openxmlformats.org/officeDocument/2006/relationships" xmlns:p="http://schemas.openxmlformats.org/presentationml/2006/main">
   <p:cSld>
@@ -828,7 +558,7 @@
           <a:p>
             <a:r>
               <a:rPr lang="en-US" dirty="0"/>
-              <a:t>Jamii Savings is a fictional bank. In the next 20 minutes: what I built for each part of the brief, the design decisions behind it, how it was verified, and the two bonus tasks. A live demo follows.</a:t>
+              <a:t>Jamii Savings is a fictional bank. In this session: what I built for each part of the brief, the design decisions behind it, how it was verified, and the two bonus tasks. A live demo follows.</a:t>
             </a:r>
             <a:endParaRPr lang="en-US" dirty="0"/>
           </a:p>
@@ -2998,22 +2728,534 @@
           </a:p>
         </p:txBody>
       </p:sp>
-      <p:graphicFrame>
-        <p:nvGraphicFramePr>
-          <p:cNvPr id="3" name="tests chart" descr=""/>
-          <p:cNvGraphicFramePr/>
-          <p:nvPr/>
-        </p:nvGraphicFramePr>
-        <p:xfrm>
-          <a:off x="548640" y="1325880"/>
-          <a:ext cx="6309360" cy="4206240"/>
-        </p:xfrm>
-        <a:graphic xmlns:a="http://schemas.openxmlformats.org/drawingml/2006/main">
-          <a:graphicData uri="http://schemas.openxmlformats.org/drawingml/2006/chart">
-            <c:chart xmlns:c="http://schemas.openxmlformats.org/drawingml/2006/chart" r:id="rId1"/>
-          </a:graphicData>
-        </a:graphic>
-      </p:graphicFrame>
+      <p:sp>
+        <p:nvSpPr>
+          <p:cNvPr id="30" name="tests chart title"/>
+          <p:cNvSpPr txBox="1"/>
+          <p:nvPr/>
+        </p:nvSpPr>
+        <p:spPr>
+          <a:xfrm>
+            <a:off x="548640" y="1325880"/>
+            <a:ext cx="6309360" cy="365760"/>
+          </a:xfrm>
+          <a:prstGeom prst="rect">
+            <a:avLst/>
+          </a:prstGeom>
+          <a:noFill/>
+          <a:ln>
+            <a:noFill/>
+          </a:ln>
+        </p:spPr>
+        <p:txBody>
+          <a:bodyPr wrap="square" lIns="0" tIns="0" rIns="0" bIns="0" anchor="t"/>
+          <a:lstStyle/>
+          <a:p>
+            <a:pPr algn="l">
+              <a:buNone/>
+            </a:pPr>
+            <a:r>
+              <a:rPr lang="en-US" sz="1600" b="0" dirty="0">
+                <a:solidFill>
+                  <a:schemeClr val="tx2"/>
+                </a:solidFill>
+                <a:latin typeface="+mj-lt"/>
+              </a:rPr>
+              <a:t>Automated checks by suite</a:t>
+            </a:r>
+          </a:p>
+        </p:txBody>
+      </p:sp>
+      <p:sp>
+        <p:nvSpPr>
+          <p:cNvPr id="31" name="tests chart label 1"/>
+          <p:cNvSpPr txBox="1"/>
+          <p:nvPr/>
+        </p:nvSpPr>
+        <p:spPr>
+          <a:xfrm>
+            <a:off x="548640" y="2011680"/>
+            <a:ext cx="2514600" cy="384048"/>
+          </a:xfrm>
+          <a:prstGeom prst="rect">
+            <a:avLst/>
+          </a:prstGeom>
+          <a:noFill/>
+          <a:ln>
+            <a:noFill/>
+          </a:ln>
+        </p:spPr>
+        <p:txBody>
+          <a:bodyPr wrap="square" lIns="0" tIns="0" rIns="0" bIns="0" anchor="ctr"/>
+          <a:lstStyle/>
+          <a:p>
+            <a:pPr algn="r">
+              <a:buNone/>
+            </a:pPr>
+            <a:r>
+              <a:rPr lang="en-US" sz="1400" b="0" dirty="0">
+                <a:solidFill>
+                  <a:schemeClr val="tx1"/>
+                </a:solidFill>
+              </a:rPr>
+              <a:t>Postman assertions (per target)</a:t>
+            </a:r>
+          </a:p>
+        </p:txBody>
+      </p:sp>
+      <p:sp>
+        <p:nvSpPr>
+          <p:cNvPr id="32" name="tests chart bar 1"/>
+          <p:cNvSpPr/>
+          <p:nvPr/>
+        </p:nvSpPr>
+        <p:spPr>
+          <a:xfrm>
+            <a:off x="3200400" y="2011680"/>
+            <a:ext cx="3017520" cy="384048"/>
+          </a:xfrm>
+          <a:prstGeom prst="roundRect">
+            <a:avLst>
+              <a:gd name="adj" fmla="val 18000"/>
+            </a:avLst>
+          </a:prstGeom>
+          <a:solidFill>
+            <a:schemeClr val="accent1"/>
+          </a:solidFill>
+          <a:ln>
+            <a:noFill/>
+          </a:ln>
+        </p:spPr>
+      </p:sp>
+      <p:sp>
+        <p:nvSpPr>
+          <p:cNvPr id="33" name="tests chart value 1"/>
+          <p:cNvSpPr txBox="1"/>
+          <p:nvPr/>
+        </p:nvSpPr>
+        <p:spPr>
+          <a:xfrm>
+            <a:off x="6309360" y="2011680"/>
+            <a:ext cx="548640" cy="384048"/>
+          </a:xfrm>
+          <a:prstGeom prst="rect">
+            <a:avLst/>
+          </a:prstGeom>
+          <a:noFill/>
+          <a:ln>
+            <a:noFill/>
+          </a:ln>
+        </p:spPr>
+        <p:txBody>
+          <a:bodyPr wrap="square" lIns="0" tIns="0" rIns="0" bIns="0" anchor="ctr"/>
+          <a:lstStyle/>
+          <a:p>
+            <a:pPr algn="l">
+              <a:buNone/>
+            </a:pPr>
+            <a:r>
+              <a:rPr lang="en-US" sz="1400" b="1" dirty="0">
+                <a:solidFill>
+                  <a:schemeClr val="tx2"/>
+                </a:solidFill>
+              </a:rPr>
+              <a:t>104</a:t>
+            </a:r>
+          </a:p>
+        </p:txBody>
+      </p:sp>
+      <p:sp>
+        <p:nvSpPr>
+          <p:cNvPr id="34" name="tests chart label 2"/>
+          <p:cNvSpPr txBox="1"/>
+          <p:nvPr/>
+        </p:nvSpPr>
+        <p:spPr>
+          <a:xfrm>
+            <a:off x="548640" y="2670048"/>
+            <a:ext cx="2514600" cy="384048"/>
+          </a:xfrm>
+          <a:prstGeom prst="rect">
+            <a:avLst/>
+          </a:prstGeom>
+          <a:noFill/>
+          <a:ln>
+            <a:noFill/>
+          </a:ln>
+        </p:spPr>
+        <p:txBody>
+          <a:bodyPr wrap="square" lIns="0" tIns="0" rIns="0" bIns="0" anchor="ctr"/>
+          <a:lstStyle/>
+          <a:p>
+            <a:pPr algn="r">
+              <a:buNone/>
+            </a:pPr>
+            <a:r>
+              <a:rPr lang="en-US" sz="1400" b="0" dirty="0">
+                <a:solidFill>
+                  <a:schemeClr val="tx1"/>
+                </a:solidFill>
+              </a:rPr>
+              <a:t>MI artifact tests</a:t>
+            </a:r>
+          </a:p>
+        </p:txBody>
+      </p:sp>
+      <p:sp>
+        <p:nvSpPr>
+          <p:cNvPr id="35" name="tests chart bar 2"/>
+          <p:cNvSpPr/>
+          <p:nvPr/>
+        </p:nvSpPr>
+        <p:spPr>
+          <a:xfrm>
+            <a:off x="3200400" y="2670048"/>
+            <a:ext cx="1160584" cy="384048"/>
+          </a:xfrm>
+          <a:prstGeom prst="roundRect">
+            <a:avLst>
+              <a:gd name="adj" fmla="val 18000"/>
+            </a:avLst>
+          </a:prstGeom>
+          <a:solidFill>
+            <a:schemeClr val="accent5"/>
+          </a:solidFill>
+          <a:ln>
+            <a:noFill/>
+          </a:ln>
+        </p:spPr>
+      </p:sp>
+      <p:sp>
+        <p:nvSpPr>
+          <p:cNvPr id="36" name="tests chart value 2"/>
+          <p:cNvSpPr txBox="1"/>
+          <p:nvPr/>
+        </p:nvSpPr>
+        <p:spPr>
+          <a:xfrm>
+            <a:off x="4452424" y="2670048"/>
+            <a:ext cx="548640" cy="384048"/>
+          </a:xfrm>
+          <a:prstGeom prst="rect">
+            <a:avLst/>
+          </a:prstGeom>
+          <a:noFill/>
+          <a:ln>
+            <a:noFill/>
+          </a:ln>
+        </p:spPr>
+        <p:txBody>
+          <a:bodyPr wrap="square" lIns="0" tIns="0" rIns="0" bIns="0" anchor="ctr"/>
+          <a:lstStyle/>
+          <a:p>
+            <a:pPr algn="l">
+              <a:buNone/>
+            </a:pPr>
+            <a:r>
+              <a:rPr lang="en-US" sz="1400" b="1" dirty="0">
+                <a:solidFill>
+                  <a:schemeClr val="tx2"/>
+                </a:solidFill>
+              </a:rPr>
+              <a:t>40</a:t>
+            </a:r>
+          </a:p>
+        </p:txBody>
+      </p:sp>
+      <p:sp>
+        <p:nvSpPr>
+          <p:cNvPr id="37" name="tests chart label 3"/>
+          <p:cNvSpPr txBox="1"/>
+          <p:nvPr/>
+        </p:nvSpPr>
+        <p:spPr>
+          <a:xfrm>
+            <a:off x="548640" y="3328416"/>
+            <a:ext cx="2514600" cy="384048"/>
+          </a:xfrm>
+          <a:prstGeom prst="rect">
+            <a:avLst/>
+          </a:prstGeom>
+          <a:noFill/>
+          <a:ln>
+            <a:noFill/>
+          </a:ln>
+        </p:spPr>
+        <p:txBody>
+          <a:bodyPr wrap="square" lIns="0" tIns="0" rIns="0" bIns="0" anchor="ctr"/>
+          <a:lstStyle/>
+          <a:p>
+            <a:pPr algn="r">
+              <a:buNone/>
+            </a:pPr>
+            <a:r>
+              <a:rPr lang="en-US" sz="1400" b="0" dirty="0">
+                <a:solidFill>
+                  <a:schemeClr val="tx1"/>
+                </a:solidFill>
+              </a:rPr>
+              <a:t>Tool and mock unit tests</a:t>
+            </a:r>
+          </a:p>
+        </p:txBody>
+      </p:sp>
+      <p:sp>
+        <p:nvSpPr>
+          <p:cNvPr id="38" name="tests chart bar 3"/>
+          <p:cNvSpPr/>
+          <p:nvPr/>
+        </p:nvSpPr>
+        <p:spPr>
+          <a:xfrm>
+            <a:off x="3200400" y="3328416"/>
+            <a:ext cx="696350" cy="384048"/>
+          </a:xfrm>
+          <a:prstGeom prst="roundRect">
+            <a:avLst>
+              <a:gd name="adj" fmla="val 18000"/>
+            </a:avLst>
+          </a:prstGeom>
+          <a:solidFill>
+            <a:schemeClr val="accent5"/>
+          </a:solidFill>
+          <a:ln>
+            <a:noFill/>
+          </a:ln>
+        </p:spPr>
+      </p:sp>
+      <p:sp>
+        <p:nvSpPr>
+          <p:cNvPr id="39" name="tests chart value 3"/>
+          <p:cNvSpPr txBox="1"/>
+          <p:nvPr/>
+        </p:nvSpPr>
+        <p:spPr>
+          <a:xfrm>
+            <a:off x="3988190" y="3328416"/>
+            <a:ext cx="548640" cy="384048"/>
+          </a:xfrm>
+          <a:prstGeom prst="rect">
+            <a:avLst/>
+          </a:prstGeom>
+          <a:noFill/>
+          <a:ln>
+            <a:noFill/>
+          </a:ln>
+        </p:spPr>
+        <p:txBody>
+          <a:bodyPr wrap="square" lIns="0" tIns="0" rIns="0" bIns="0" anchor="ctr"/>
+          <a:lstStyle/>
+          <a:p>
+            <a:pPr algn="l">
+              <a:buNone/>
+            </a:pPr>
+            <a:r>
+              <a:rPr lang="en-US" sz="1400" b="1" dirty="0">
+                <a:solidFill>
+                  <a:schemeClr val="tx2"/>
+                </a:solidFill>
+              </a:rPr>
+              <a:t>24</a:t>
+            </a:r>
+          </a:p>
+        </p:txBody>
+      </p:sp>
+      <p:sp>
+        <p:nvSpPr>
+          <p:cNvPr id="40" name="tests chart label 4"/>
+          <p:cNvSpPr txBox="1"/>
+          <p:nvPr/>
+        </p:nvSpPr>
+        <p:spPr>
+          <a:xfrm>
+            <a:off x="548640" y="3986784"/>
+            <a:ext cx="2514600" cy="384048"/>
+          </a:xfrm>
+          <a:prstGeom prst="rect">
+            <a:avLst/>
+          </a:prstGeom>
+          <a:noFill/>
+          <a:ln>
+            <a:noFill/>
+          </a:ln>
+        </p:spPr>
+        <p:txBody>
+          <a:bodyPr wrap="square" lIns="0" tIns="0" rIns="0" bIns="0" anchor="ctr"/>
+          <a:lstStyle/>
+          <a:p>
+            <a:pPr algn="r">
+              <a:buNone/>
+            </a:pPr>
+            <a:r>
+              <a:rPr lang="en-US" sz="1400" b="0" dirty="0">
+                <a:solidFill>
+                  <a:schemeClr val="tx1"/>
+                </a:solidFill>
+              </a:rPr>
+              <a:t>Event scenarios</a:t>
+            </a:r>
+          </a:p>
+        </p:txBody>
+      </p:sp>
+      <p:sp>
+        <p:nvSpPr>
+          <p:cNvPr id="41" name="tests chart bar 4"/>
+          <p:cNvSpPr/>
+          <p:nvPr/>
+        </p:nvSpPr>
+        <p:spPr>
+          <a:xfrm>
+            <a:off x="3200400" y="3986784"/>
+            <a:ext cx="174087" cy="384048"/>
+          </a:xfrm>
+          <a:prstGeom prst="roundRect">
+            <a:avLst>
+              <a:gd name="adj" fmla="val 18000"/>
+            </a:avLst>
+          </a:prstGeom>
+          <a:solidFill>
+            <a:schemeClr val="accent5"/>
+          </a:solidFill>
+          <a:ln>
+            <a:noFill/>
+          </a:ln>
+        </p:spPr>
+      </p:sp>
+      <p:sp>
+        <p:nvSpPr>
+          <p:cNvPr id="42" name="tests chart value 4"/>
+          <p:cNvSpPr txBox="1"/>
+          <p:nvPr/>
+        </p:nvSpPr>
+        <p:spPr>
+          <a:xfrm>
+            <a:off x="3465927" y="3986784"/>
+            <a:ext cx="548640" cy="384048"/>
+          </a:xfrm>
+          <a:prstGeom prst="rect">
+            <a:avLst/>
+          </a:prstGeom>
+          <a:noFill/>
+          <a:ln>
+            <a:noFill/>
+          </a:ln>
+        </p:spPr>
+        <p:txBody>
+          <a:bodyPr wrap="square" lIns="0" tIns="0" rIns="0" bIns="0" anchor="ctr"/>
+          <a:lstStyle/>
+          <a:p>
+            <a:pPr algn="l">
+              <a:buNone/>
+            </a:pPr>
+            <a:r>
+              <a:rPr lang="en-US" sz="1400" b="1" dirty="0">
+                <a:solidFill>
+                  <a:schemeClr val="tx2"/>
+                </a:solidFill>
+              </a:rPr>
+              <a:t>6</a:t>
+            </a:r>
+          </a:p>
+        </p:txBody>
+      </p:sp>
+      <p:sp>
+        <p:nvSpPr>
+          <p:cNvPr id="43" name="tests chart label 5"/>
+          <p:cNvSpPr txBox="1"/>
+          <p:nvPr/>
+        </p:nvSpPr>
+        <p:spPr>
+          <a:xfrm>
+            <a:off x="548640" y="4645152"/>
+            <a:ext cx="2514600" cy="384048"/>
+          </a:xfrm>
+          <a:prstGeom prst="rect">
+            <a:avLst/>
+          </a:prstGeom>
+          <a:noFill/>
+          <a:ln>
+            <a:noFill/>
+          </a:ln>
+        </p:spPr>
+        <p:txBody>
+          <a:bodyPr wrap="square" lIns="0" tIns="0" rIns="0" bIns="0" anchor="ctr"/>
+          <a:lstStyle/>
+          <a:p>
+            <a:pPr algn="r">
+              <a:buNone/>
+            </a:pPr>
+            <a:r>
+              <a:rPr lang="en-US" sz="1400" b="0" dirty="0">
+                <a:solidFill>
+                  <a:schemeClr val="tx1"/>
+                </a:solidFill>
+              </a:rPr>
+              <a:t>Outage tests</a:t>
+            </a:r>
+          </a:p>
+        </p:txBody>
+      </p:sp>
+      <p:sp>
+        <p:nvSpPr>
+          <p:cNvPr id="44" name="tests chart bar 5"/>
+          <p:cNvSpPr/>
+          <p:nvPr/>
+        </p:nvSpPr>
+        <p:spPr>
+          <a:xfrm>
+            <a:off x="3200400" y="4645152"/>
+            <a:ext cx="116058" cy="384048"/>
+          </a:xfrm>
+          <a:prstGeom prst="roundRect">
+            <a:avLst>
+              <a:gd name="adj" fmla="val 18000"/>
+            </a:avLst>
+          </a:prstGeom>
+          <a:solidFill>
+            <a:schemeClr val="accent5"/>
+          </a:solidFill>
+          <a:ln>
+            <a:noFill/>
+          </a:ln>
+        </p:spPr>
+      </p:sp>
+      <p:sp>
+        <p:nvSpPr>
+          <p:cNvPr id="45" name="tests chart value 5"/>
+          <p:cNvSpPr txBox="1"/>
+          <p:nvPr/>
+        </p:nvSpPr>
+        <p:spPr>
+          <a:xfrm>
+            <a:off x="3407898" y="4645152"/>
+            <a:ext cx="548640" cy="384048"/>
+          </a:xfrm>
+          <a:prstGeom prst="rect">
+            <a:avLst/>
+          </a:prstGeom>
+          <a:noFill/>
+          <a:ln>
+            <a:noFill/>
+          </a:ln>
+        </p:spPr>
+        <p:txBody>
+          <a:bodyPr wrap="square" lIns="0" tIns="0" rIns="0" bIns="0" anchor="ctr"/>
+          <a:lstStyle/>
+          <a:p>
+            <a:pPr algn="l">
+              <a:buNone/>
+            </a:pPr>
+            <a:r>
+              <a:rPr lang="en-US" sz="1400" b="1" dirty="0">
+                <a:solidFill>
+                  <a:schemeClr val="tx2"/>
+                </a:solidFill>
+              </a:rPr>
+              <a:t>4</a:t>
+            </a:r>
+          </a:p>
+        </p:txBody>
+      </p:sp>
       <p:sp>
         <p:nvSpPr>
           <p:cNvPr id="4" name="bugs heading"/>
@@ -5161,7 +5403,7 @@
             <a:r>
               <a:rPr lang="en-US" sz="1400" dirty="0">
                 <a:solidFill>
-                  <a:schemeClr val="accent5"/>
+                  <a:schemeClr val="bg2"/>
                 </a:solidFill>
                 <a:latin typeface="Courier New" pitchFamily="34" charset="0"/>
                 <a:ea typeface="Courier New" pitchFamily="34" charset="-122"/>
@@ -6327,9 +6569,9 @@
           <p:nvPr/>
         </p:nvSpPr>
         <p:spPr>
-          <a:xfrm>
-            <a:off x="9006840" y="3337560"/>
-            <a:ext cx="640080" cy="-1554480"/>
+          <a:xfrm flipV="1">
+            <a:off x="9006840" y="1783080"/>
+            <a:ext cx="640080" cy="1554480"/>
           </a:xfrm>
           <a:prstGeom prst="line">
             <a:avLst/>
@@ -6351,9 +6593,9 @@
           <p:nvPr/>
         </p:nvSpPr>
         <p:spPr>
-          <a:xfrm>
-            <a:off x="9006840" y="3337560"/>
-            <a:ext cx="640080" cy="-457200"/>
+          <a:xfrm flipV="1">
+            <a:off x="9006840" y="2880360"/>
+            <a:ext cx="640080" cy="457200"/>
           </a:xfrm>
           <a:prstGeom prst="line">
             <a:avLst/>
